--- a/dba/coursework/GEB7365_International_Business/GEB7365_Module2_COMBINED.pptx
+++ b/dba/coursework/GEB7365_International_Business/GEB7365_Module2_COMBINED.pptx
@@ -2963,7 +2963,7 @@
         <p:spPr>
           <a:xfrm>
             <a:off x="502920" y="1170432"/>
-            <a:ext cx="11186160" cy="914400"/>
+            <a:ext cx="11186160" cy="585216"/>
           </a:xfrm>
           <a:prstGeom prst="rect">
             <a:avLst/>
@@ -4589,7 +4589,7 @@
         <p:spPr>
           <a:xfrm>
             <a:off x="502920" y="1170432"/>
-            <a:ext cx="11186160" cy="914400"/>
+            <a:ext cx="11186160" cy="585216"/>
           </a:xfrm>
           <a:prstGeom prst="rect">
             <a:avLst/>
@@ -5983,7 +5983,7 @@
         <p:spPr>
           <a:xfrm>
             <a:off x="502920" y="1170432"/>
-            <a:ext cx="11186160" cy="914400"/>
+            <a:ext cx="11186160" cy="585216"/>
           </a:xfrm>
           <a:prstGeom prst="rect">
             <a:avLst/>
@@ -7914,7 +7914,7 @@
         <p:spPr>
           <a:xfrm>
             <a:off x="502920" y="1170432"/>
-            <a:ext cx="11186160" cy="914400"/>
+            <a:ext cx="11186160" cy="585216"/>
           </a:xfrm>
           <a:prstGeom prst="rect">
             <a:avLst/>
@@ -8284,7 +8284,7 @@
         <p:spPr>
           <a:xfrm>
             <a:off x="1920240" y="2962656"/>
-            <a:ext cx="3566160" cy="228600"/>
+            <a:ext cx="3291840" cy="228600"/>
           </a:xfrm>
           <a:prstGeom prst="rect">
             <a:avLst/>
@@ -8322,8 +8322,8 @@
         </p:nvSpPr>
         <p:spPr>
           <a:xfrm>
-            <a:off x="5212080" y="2971800"/>
-            <a:ext cx="411480" cy="182880"/>
+            <a:off x="5330952" y="2971800"/>
+            <a:ext cx="274320" cy="182880"/>
           </a:xfrm>
           <a:prstGeom prst="rect">
             <a:avLst/>
@@ -8484,7 +8484,7 @@
         <p:spPr>
           <a:xfrm>
             <a:off x="1920240" y="3364992"/>
-            <a:ext cx="3566160" cy="228600"/>
+            <a:ext cx="3291840" cy="228600"/>
           </a:xfrm>
           <a:prstGeom prst="rect">
             <a:avLst/>
@@ -8522,8 +8522,8 @@
         </p:nvSpPr>
         <p:spPr>
           <a:xfrm>
-            <a:off x="5212080" y="3374136"/>
-            <a:ext cx="411480" cy="182880"/>
+            <a:off x="5330952" y="3374136"/>
+            <a:ext cx="274320" cy="182880"/>
           </a:xfrm>
           <a:prstGeom prst="rect">
             <a:avLst/>
@@ -8684,7 +8684,7 @@
         <p:spPr>
           <a:xfrm>
             <a:off x="1920240" y="3767328"/>
-            <a:ext cx="3566160" cy="228600"/>
+            <a:ext cx="3291840" cy="228600"/>
           </a:xfrm>
           <a:prstGeom prst="rect">
             <a:avLst/>
@@ -8722,8 +8722,8 @@
         </p:nvSpPr>
         <p:spPr>
           <a:xfrm>
-            <a:off x="5212080" y="3776472"/>
-            <a:ext cx="411480" cy="182880"/>
+            <a:off x="5330952" y="3776472"/>
+            <a:ext cx="274320" cy="182880"/>
           </a:xfrm>
           <a:prstGeom prst="rect">
             <a:avLst/>
@@ -8884,7 +8884,7 @@
         <p:spPr>
           <a:xfrm>
             <a:off x="1920240" y="4169664"/>
-            <a:ext cx="3566160" cy="228600"/>
+            <a:ext cx="3291840" cy="228600"/>
           </a:xfrm>
           <a:prstGeom prst="rect">
             <a:avLst/>
@@ -8922,8 +8922,8 @@
         </p:nvSpPr>
         <p:spPr>
           <a:xfrm>
-            <a:off x="5212080" y="4178808"/>
-            <a:ext cx="411480" cy="182880"/>
+            <a:off x="5330952" y="4178808"/>
+            <a:ext cx="274320" cy="182880"/>
           </a:xfrm>
           <a:prstGeom prst="rect">
             <a:avLst/>
@@ -10708,7 +10708,7 @@
         <p:spPr>
           <a:xfrm>
             <a:off x="502920" y="1170432"/>
-            <a:ext cx="11186160" cy="914400"/>
+            <a:ext cx="11186160" cy="574495"/>
           </a:xfrm>
           <a:prstGeom prst="rect">
             <a:avLst/>
@@ -11701,7 +11701,7 @@
         <p:spPr>
           <a:xfrm>
             <a:off x="502920" y="1170432"/>
-            <a:ext cx="11186160" cy="914400"/>
+            <a:ext cx="11186160" cy="574495"/>
           </a:xfrm>
           <a:prstGeom prst="rect">
             <a:avLst/>
@@ -11739,8 +11739,8 @@
         </p:nvSpPr>
         <p:spPr>
           <a:xfrm>
-            <a:off x="594360" y="1847088"/>
-            <a:ext cx="2743200" cy="182880"/>
+            <a:off x="594360" y="1920240"/>
+            <a:ext cx="658368" cy="182880"/>
           </a:xfrm>
           <a:prstGeom prst="rect">
             <a:avLst/>
@@ -11778,8 +11778,8 @@
         </p:nvSpPr>
         <p:spPr>
           <a:xfrm>
-            <a:off x="1280160" y="1847088"/>
-            <a:ext cx="2743200" cy="182880"/>
+            <a:off x="1371600" y="1920240"/>
+            <a:ext cx="1280160" cy="182880"/>
           </a:xfrm>
           <a:prstGeom prst="rect">
             <a:avLst/>
@@ -11817,8 +11817,8 @@
         </p:nvSpPr>
         <p:spPr>
           <a:xfrm>
-            <a:off x="6355080" y="1847088"/>
-            <a:ext cx="2743200" cy="182880"/>
+            <a:off x="6355080" y="1920240"/>
+            <a:ext cx="1280160" cy="182880"/>
           </a:xfrm>
           <a:prstGeom prst="rect">
             <a:avLst/>
@@ -11856,8 +11856,8 @@
         </p:nvSpPr>
         <p:spPr>
           <a:xfrm>
-            <a:off x="9189720" y="1847088"/>
-            <a:ext cx="2743200" cy="182880"/>
+            <a:off x="9189720" y="1920240"/>
+            <a:ext cx="1280160" cy="182880"/>
           </a:xfrm>
           <a:prstGeom prst="rect">
             <a:avLst/>
@@ -11895,7 +11895,7 @@
         </p:nvSpPr>
         <p:spPr>
           <a:xfrm>
-            <a:off x="502920" y="2029968"/>
+            <a:off x="502920" y="2103120"/>
             <a:ext cx="11186160" cy="9525"/>
           </a:xfrm>
           <a:prstGeom prst="rect">
@@ -11939,7 +11939,7 @@
         </p:nvSpPr>
         <p:spPr>
           <a:xfrm>
-            <a:off x="594360" y="2139696"/>
+            <a:off x="594360" y="2212848"/>
             <a:ext cx="640080" cy="182880"/>
           </a:xfrm>
           <a:prstGeom prst="rect">
@@ -11978,7 +11978,7 @@
         </p:nvSpPr>
         <p:spPr>
           <a:xfrm>
-            <a:off x="1280160" y="2139696"/>
+            <a:off x="1371600" y="2212848"/>
             <a:ext cx="4937760" cy="201168"/>
           </a:xfrm>
           <a:prstGeom prst="rect">
@@ -12017,7 +12017,7 @@
         </p:nvSpPr>
         <p:spPr>
           <a:xfrm>
-            <a:off x="6355080" y="2139696"/>
+            <a:off x="6355080" y="2212848"/>
             <a:ext cx="2743200" cy="201168"/>
           </a:xfrm>
           <a:prstGeom prst="rect">
@@ -12056,7 +12056,7 @@
         </p:nvSpPr>
         <p:spPr>
           <a:xfrm>
-            <a:off x="9189720" y="2139696"/>
+            <a:off x="9189720" y="2212848"/>
             <a:ext cx="1097280" cy="182880"/>
           </a:xfrm>
           <a:prstGeom prst="rect">
@@ -12095,7 +12095,7 @@
         </p:nvSpPr>
         <p:spPr>
           <a:xfrm>
-            <a:off x="502920" y="2340864"/>
+            <a:off x="502920" y="2414016"/>
             <a:ext cx="11186160" cy="6350"/>
           </a:xfrm>
           <a:prstGeom prst="rect">
@@ -12139,7 +12139,7 @@
         </p:nvSpPr>
         <p:spPr>
           <a:xfrm>
-            <a:off x="594360" y="2391156"/>
+            <a:off x="594360" y="2464308"/>
             <a:ext cx="640080" cy="182880"/>
           </a:xfrm>
           <a:prstGeom prst="rect">
@@ -12178,7 +12178,7 @@
         </p:nvSpPr>
         <p:spPr>
           <a:xfrm>
-            <a:off x="1280160" y="2391156"/>
+            <a:off x="1371600" y="2464308"/>
             <a:ext cx="4937760" cy="201168"/>
           </a:xfrm>
           <a:prstGeom prst="rect">
@@ -12217,7 +12217,7 @@
         </p:nvSpPr>
         <p:spPr>
           <a:xfrm>
-            <a:off x="6355080" y="2391156"/>
+            <a:off x="6355080" y="2464308"/>
             <a:ext cx="2743200" cy="201168"/>
           </a:xfrm>
           <a:prstGeom prst="rect">
@@ -12256,7 +12256,7 @@
         </p:nvSpPr>
         <p:spPr>
           <a:xfrm>
-            <a:off x="9189720" y="2391156"/>
+            <a:off x="9189720" y="2464308"/>
             <a:ext cx="1097280" cy="182880"/>
           </a:xfrm>
           <a:prstGeom prst="rect">
@@ -12295,7 +12295,7 @@
         </p:nvSpPr>
         <p:spPr>
           <a:xfrm>
-            <a:off x="502920" y="2592324"/>
+            <a:off x="502920" y="2665476"/>
             <a:ext cx="11186160" cy="6350"/>
           </a:xfrm>
           <a:prstGeom prst="rect">
@@ -12339,7 +12339,7 @@
         </p:nvSpPr>
         <p:spPr>
           <a:xfrm>
-            <a:off x="594360" y="2642616"/>
+            <a:off x="594360" y="2715768"/>
             <a:ext cx="640080" cy="182880"/>
           </a:xfrm>
           <a:prstGeom prst="rect">
@@ -12378,7 +12378,7 @@
         </p:nvSpPr>
         <p:spPr>
           <a:xfrm>
-            <a:off x="1280160" y="2642616"/>
+            <a:off x="1371600" y="2715768"/>
             <a:ext cx="4937760" cy="201168"/>
           </a:xfrm>
           <a:prstGeom prst="rect">
@@ -12417,7 +12417,7 @@
         </p:nvSpPr>
         <p:spPr>
           <a:xfrm>
-            <a:off x="6355080" y="2642616"/>
+            <a:off x="6355080" y="2715768"/>
             <a:ext cx="2743200" cy="201168"/>
           </a:xfrm>
           <a:prstGeom prst="rect">
@@ -12456,7 +12456,7 @@
         </p:nvSpPr>
         <p:spPr>
           <a:xfrm>
-            <a:off x="9189720" y="2642616"/>
+            <a:off x="9189720" y="2715768"/>
             <a:ext cx="1097280" cy="182880"/>
           </a:xfrm>
           <a:prstGeom prst="rect">
@@ -12495,7 +12495,7 @@
         </p:nvSpPr>
         <p:spPr>
           <a:xfrm>
-            <a:off x="502920" y="2843784"/>
+            <a:off x="502920" y="2916936"/>
             <a:ext cx="11186160" cy="6350"/>
           </a:xfrm>
           <a:prstGeom prst="rect">
@@ -12539,7 +12539,7 @@
         </p:nvSpPr>
         <p:spPr>
           <a:xfrm>
-            <a:off x="594360" y="2894076"/>
+            <a:off x="594360" y="2967228"/>
             <a:ext cx="640080" cy="182880"/>
           </a:xfrm>
           <a:prstGeom prst="rect">
@@ -12578,7 +12578,7 @@
         </p:nvSpPr>
         <p:spPr>
           <a:xfrm>
-            <a:off x="1280160" y="2894076"/>
+            <a:off x="1371600" y="2967228"/>
             <a:ext cx="4937760" cy="201168"/>
           </a:xfrm>
           <a:prstGeom prst="rect">
@@ -12617,7 +12617,7 @@
         </p:nvSpPr>
         <p:spPr>
           <a:xfrm>
-            <a:off x="6355080" y="2894076"/>
+            <a:off x="6355080" y="2967228"/>
             <a:ext cx="2743200" cy="201168"/>
           </a:xfrm>
           <a:prstGeom prst="rect">
@@ -12656,7 +12656,7 @@
         </p:nvSpPr>
         <p:spPr>
           <a:xfrm>
-            <a:off x="9189720" y="2894076"/>
+            <a:off x="9189720" y="2967228"/>
             <a:ext cx="1097280" cy="182880"/>
           </a:xfrm>
           <a:prstGeom prst="rect">
@@ -12695,7 +12695,7 @@
         </p:nvSpPr>
         <p:spPr>
           <a:xfrm>
-            <a:off x="502920" y="3095244"/>
+            <a:off x="502920" y="3168396"/>
             <a:ext cx="11186160" cy="6350"/>
           </a:xfrm>
           <a:prstGeom prst="rect">
@@ -12739,7 +12739,7 @@
         </p:nvSpPr>
         <p:spPr>
           <a:xfrm>
-            <a:off x="594360" y="3145536"/>
+            <a:off x="594360" y="3218688"/>
             <a:ext cx="640080" cy="182880"/>
           </a:xfrm>
           <a:prstGeom prst="rect">
@@ -12778,7 +12778,7 @@
         </p:nvSpPr>
         <p:spPr>
           <a:xfrm>
-            <a:off x="1280160" y="3145536"/>
+            <a:off x="1371600" y="3218688"/>
             <a:ext cx="4937760" cy="201168"/>
           </a:xfrm>
           <a:prstGeom prst="rect">
@@ -12817,7 +12817,7 @@
         </p:nvSpPr>
         <p:spPr>
           <a:xfrm>
-            <a:off x="6355080" y="3145536"/>
+            <a:off x="6355080" y="3218688"/>
             <a:ext cx="2743200" cy="201168"/>
           </a:xfrm>
           <a:prstGeom prst="rect">
@@ -12856,7 +12856,7 @@
         </p:nvSpPr>
         <p:spPr>
           <a:xfrm>
-            <a:off x="9189720" y="3145536"/>
+            <a:off x="9189720" y="3218688"/>
             <a:ext cx="1097280" cy="182880"/>
           </a:xfrm>
           <a:prstGeom prst="rect">
@@ -12895,7 +12895,7 @@
         </p:nvSpPr>
         <p:spPr>
           <a:xfrm>
-            <a:off x="502920" y="3346704"/>
+            <a:off x="502920" y="3419856"/>
             <a:ext cx="11186160" cy="6350"/>
           </a:xfrm>
           <a:prstGeom prst="rect">
@@ -12939,7 +12939,7 @@
         </p:nvSpPr>
         <p:spPr>
           <a:xfrm>
-            <a:off x="594360" y="3396996"/>
+            <a:off x="594360" y="3470148"/>
             <a:ext cx="640080" cy="182880"/>
           </a:xfrm>
           <a:prstGeom prst="rect">
@@ -12978,7 +12978,7 @@
         </p:nvSpPr>
         <p:spPr>
           <a:xfrm>
-            <a:off x="1280160" y="3396996"/>
+            <a:off x="1371600" y="3470148"/>
             <a:ext cx="4937760" cy="201168"/>
           </a:xfrm>
           <a:prstGeom prst="rect">
@@ -13017,7 +13017,7 @@
         </p:nvSpPr>
         <p:spPr>
           <a:xfrm>
-            <a:off x="6355080" y="3396996"/>
+            <a:off x="6355080" y="3470148"/>
             <a:ext cx="2743200" cy="201168"/>
           </a:xfrm>
           <a:prstGeom prst="rect">
@@ -13056,7 +13056,7 @@
         </p:nvSpPr>
         <p:spPr>
           <a:xfrm>
-            <a:off x="9189720" y="3396996"/>
+            <a:off x="9189720" y="3470148"/>
             <a:ext cx="1097280" cy="182880"/>
           </a:xfrm>
           <a:prstGeom prst="rect">
@@ -13095,7 +13095,7 @@
         </p:nvSpPr>
         <p:spPr>
           <a:xfrm>
-            <a:off x="502920" y="3598164"/>
+            <a:off x="502920" y="3671316"/>
             <a:ext cx="11186160" cy="6350"/>
           </a:xfrm>
           <a:prstGeom prst="rect">
@@ -13139,7 +13139,7 @@
         </p:nvSpPr>
         <p:spPr>
           <a:xfrm>
-            <a:off x="594360" y="3648456"/>
+            <a:off x="594360" y="3721608"/>
             <a:ext cx="640080" cy="182880"/>
           </a:xfrm>
           <a:prstGeom prst="rect">
@@ -13178,7 +13178,7 @@
         </p:nvSpPr>
         <p:spPr>
           <a:xfrm>
-            <a:off x="1280160" y="3648456"/>
+            <a:off x="1371600" y="3721608"/>
             <a:ext cx="4937760" cy="201168"/>
           </a:xfrm>
           <a:prstGeom prst="rect">
@@ -13217,7 +13217,7 @@
         </p:nvSpPr>
         <p:spPr>
           <a:xfrm>
-            <a:off x="6355080" y="3648456"/>
+            <a:off x="6355080" y="3721608"/>
             <a:ext cx="2743200" cy="201168"/>
           </a:xfrm>
           <a:prstGeom prst="rect">
@@ -13256,7 +13256,7 @@
         </p:nvSpPr>
         <p:spPr>
           <a:xfrm>
-            <a:off x="9189720" y="3648456"/>
+            <a:off x="9189720" y="3721608"/>
             <a:ext cx="1097280" cy="182880"/>
           </a:xfrm>
           <a:prstGeom prst="rect">
@@ -13295,7 +13295,7 @@
         </p:nvSpPr>
         <p:spPr>
           <a:xfrm>
-            <a:off x="502920" y="3849624"/>
+            <a:off x="502920" y="3922776"/>
             <a:ext cx="11186160" cy="6350"/>
           </a:xfrm>
           <a:prstGeom prst="rect">
@@ -13339,7 +13339,7 @@
         </p:nvSpPr>
         <p:spPr>
           <a:xfrm>
-            <a:off x="594360" y="3899916"/>
+            <a:off x="594360" y="3973068"/>
             <a:ext cx="640080" cy="182880"/>
           </a:xfrm>
           <a:prstGeom prst="rect">
@@ -13378,7 +13378,7 @@
         </p:nvSpPr>
         <p:spPr>
           <a:xfrm>
-            <a:off x="1280160" y="3899916"/>
+            <a:off x="1371600" y="3973068"/>
             <a:ext cx="4937760" cy="201168"/>
           </a:xfrm>
           <a:prstGeom prst="rect">
@@ -13417,7 +13417,7 @@
         </p:nvSpPr>
         <p:spPr>
           <a:xfrm>
-            <a:off x="6355080" y="3899916"/>
+            <a:off x="6355080" y="3973068"/>
             <a:ext cx="2743200" cy="201168"/>
           </a:xfrm>
           <a:prstGeom prst="rect">
@@ -13456,7 +13456,7 @@
         </p:nvSpPr>
         <p:spPr>
           <a:xfrm>
-            <a:off x="9189720" y="3899916"/>
+            <a:off x="9189720" y="3973068"/>
             <a:ext cx="1097280" cy="182880"/>
           </a:xfrm>
           <a:prstGeom prst="rect">
@@ -13495,7 +13495,7 @@
         </p:nvSpPr>
         <p:spPr>
           <a:xfrm>
-            <a:off x="502920" y="4101084"/>
+            <a:off x="502920" y="4174236"/>
             <a:ext cx="11186160" cy="6350"/>
           </a:xfrm>
           <a:prstGeom prst="rect">
@@ -13539,7 +13539,7 @@
         </p:nvSpPr>
         <p:spPr>
           <a:xfrm>
-            <a:off x="594360" y="4151376"/>
+            <a:off x="594360" y="4224528"/>
             <a:ext cx="640080" cy="182880"/>
           </a:xfrm>
           <a:prstGeom prst="rect">
@@ -13578,7 +13578,7 @@
         </p:nvSpPr>
         <p:spPr>
           <a:xfrm>
-            <a:off x="1280160" y="4151376"/>
+            <a:off x="1371600" y="4224528"/>
             <a:ext cx="4937760" cy="201168"/>
           </a:xfrm>
           <a:prstGeom prst="rect">
@@ -13617,7 +13617,7 @@
         </p:nvSpPr>
         <p:spPr>
           <a:xfrm>
-            <a:off x="6355080" y="4151376"/>
+            <a:off x="6355080" y="4224528"/>
             <a:ext cx="2743200" cy="201168"/>
           </a:xfrm>
           <a:prstGeom prst="rect">
@@ -13656,7 +13656,7 @@
         </p:nvSpPr>
         <p:spPr>
           <a:xfrm>
-            <a:off x="9189720" y="4151376"/>
+            <a:off x="9189720" y="4224528"/>
             <a:ext cx="1097280" cy="182880"/>
           </a:xfrm>
           <a:prstGeom prst="rect">
@@ -13695,7 +13695,7 @@
         </p:nvSpPr>
         <p:spPr>
           <a:xfrm>
-            <a:off x="502920" y="4352544"/>
+            <a:off x="502920" y="4425696"/>
             <a:ext cx="11186160" cy="6350"/>
           </a:xfrm>
           <a:prstGeom prst="rect">
@@ -13739,7 +13739,7 @@
         </p:nvSpPr>
         <p:spPr>
           <a:xfrm>
-            <a:off x="594360" y="4402836"/>
+            <a:off x="594360" y="4475988"/>
             <a:ext cx="640080" cy="182880"/>
           </a:xfrm>
           <a:prstGeom prst="rect">
@@ -13778,7 +13778,7 @@
         </p:nvSpPr>
         <p:spPr>
           <a:xfrm>
-            <a:off x="1280160" y="4402836"/>
+            <a:off x="1371600" y="4475988"/>
             <a:ext cx="4937760" cy="201168"/>
           </a:xfrm>
           <a:prstGeom prst="rect">
@@ -13817,7 +13817,7 @@
         </p:nvSpPr>
         <p:spPr>
           <a:xfrm>
-            <a:off x="6355080" y="4402836"/>
+            <a:off x="6355080" y="4475988"/>
             <a:ext cx="2743200" cy="201168"/>
           </a:xfrm>
           <a:prstGeom prst="rect">
@@ -13856,7 +13856,7 @@
         </p:nvSpPr>
         <p:spPr>
           <a:xfrm>
-            <a:off x="9189720" y="4402836"/>
+            <a:off x="9189720" y="4475988"/>
             <a:ext cx="1097280" cy="182880"/>
           </a:xfrm>
           <a:prstGeom prst="rect">
@@ -13895,7 +13895,7 @@
         </p:nvSpPr>
         <p:spPr>
           <a:xfrm>
-            <a:off x="502920" y="4604004"/>
+            <a:off x="502920" y="4677156"/>
             <a:ext cx="11186160" cy="6350"/>
           </a:xfrm>
           <a:prstGeom prst="rect">
@@ -13939,7 +13939,7 @@
         </p:nvSpPr>
         <p:spPr>
           <a:xfrm>
-            <a:off x="594360" y="4654296"/>
+            <a:off x="594360" y="4727448"/>
             <a:ext cx="640080" cy="182880"/>
           </a:xfrm>
           <a:prstGeom prst="rect">
@@ -13978,7 +13978,7 @@
         </p:nvSpPr>
         <p:spPr>
           <a:xfrm>
-            <a:off x="1280160" y="4654296"/>
+            <a:off x="1371600" y="4727448"/>
             <a:ext cx="4937760" cy="201168"/>
           </a:xfrm>
           <a:prstGeom prst="rect">
@@ -14017,7 +14017,7 @@
         </p:nvSpPr>
         <p:spPr>
           <a:xfrm>
-            <a:off x="6355080" y="4654296"/>
+            <a:off x="6355080" y="4727448"/>
             <a:ext cx="2743200" cy="201168"/>
           </a:xfrm>
           <a:prstGeom prst="rect">
@@ -14056,7 +14056,7 @@
         </p:nvSpPr>
         <p:spPr>
           <a:xfrm>
-            <a:off x="9189720" y="4654296"/>
+            <a:off x="9189720" y="4727448"/>
             <a:ext cx="1097280" cy="182880"/>
           </a:xfrm>
           <a:prstGeom prst="rect">
@@ -14095,7 +14095,7 @@
         </p:nvSpPr>
         <p:spPr>
           <a:xfrm>
-            <a:off x="502920" y="4855464"/>
+            <a:off x="502920" y="4928616"/>
             <a:ext cx="11186160" cy="6350"/>
           </a:xfrm>
           <a:prstGeom prst="rect">
@@ -14589,7 +14589,7 @@
         <p:spPr>
           <a:xfrm>
             <a:off x="502920" y="1170432"/>
-            <a:ext cx="11186160" cy="914400"/>
+            <a:ext cx="11186160" cy="574495"/>
           </a:xfrm>
           <a:prstGeom prst="rect">
             <a:avLst/>
